--- a/mascot-test/enhanced/test-deck.pptx
+++ b/mascot-test/enhanced/test-deck.pptx
@@ -503,7 +503,7 @@
           <a:lstStyle/>
           <a:p>
             <a:r>
-              <a:t>Coffee is practically the lifeblood of the tech world, providing developers everywhere with the sustained energy needed to tackle complex lines of code. Whether your personal preference is a concentrated espresso, a smooth filter, or refreshing cold brew, it’s that familiar caffeine kick that fuels creativity and focus during long coding sessions.</a:t>
+              <a:t>Now, let's talk about something synonymous with our industry: coffee. It is more than just a beverage; it provides the essential energy needed during deep work and long coding sessions. Whether you prefer an espresso shot, a filtered cup, or a cold brew, it remains a core staple of our daily routine.</a:t>
             </a:r>
           </a:p>
         </p:txBody>
@@ -573,7 +573,7 @@
           <a:lstStyle/>
           <a:p>
             <a:r>
-              <a:t>If coffee is known for its immediate jolt, tea serves as a much quieter alternative for those seeking sustained focus. Whether you prefer the vibrant earthiness of matcha, the sophisticated profile of oolong, or a classic earl grey, these varieties offer a more grounded and balanced way to begin your day.</a:t>
+              <a:t>If you’re looking for a gentler alternative to the quick jolt of coffee, tea offers a much steadier experience. Whether you prefer the earthy richness of matcha, the complex profile of an oolong, or the classic floral notes of an Earl Grey, it provides a calmer way to find your focus.</a:t>
             </a:r>
           </a:p>
         </p:txBody>
